--- a/templates/carousels/posts/09-10-2026-fri-checklist.pptx
+++ b/templates/carousels/posts/09-10-2026-fri-checklist.pptx
@@ -3965,7 +3965,7 @@
     <p:bg>
       <p:bgPr>
         <a:solidFill>
-          <a:srgbClr val="22371F"/>
+          <a:srgbClr val="1E3F1D"/>
         </a:solidFill>
         <a:effectLst/>
       </p:bgPr>
@@ -3992,7 +3992,7 @@
             <a:avLst/>
           </a:prstGeom>
           <a:solidFill>
-            <a:srgbClr val="C9A227"/>
+            <a:srgbClr val="D39C48"/>
           </a:solidFill>
           <a:ln>
             <a:noFill/>
@@ -4047,7 +4047,7 @@
             <a:r>
               <a:rPr sz="3000" b="1" i="0">
                 <a:solidFill>
-                  <a:srgbClr val="22371F"/>
+                  <a:srgbClr val="1E3F1D"/>
                 </a:solidFill>
                 <a:latin typeface="Montserrat"/>
               </a:rPr>
@@ -4121,7 +4121,7 @@
             <a:r>
               <a:rPr sz="5700" b="0" i="1">
                 <a:solidFill>
-                  <a:srgbClr val="DBE6A7"/>
+                  <a:srgbClr val="B1BCB1"/>
                 </a:solidFill>
                 <a:latin typeface="EB Garamond"/>
               </a:rPr>
@@ -4132,7 +4132,7 @@
       </p:sp>
       <p:pic>
         <p:nvPicPr>
-          <p:cNvPr id="6" name="Picture 5" descr="st6107550414992203228.png"/>
+          <p:cNvPr id="6" name="Picture 5" descr="st3791601828493901168.png"/>
           <p:cNvPicPr>
             <a:picLocks noChangeAspect="1"/>
           </p:cNvPicPr>
@@ -4180,7 +4180,7 @@
             <a:r>
               <a:rPr sz="3000" b="1" i="0">
                 <a:solidFill>
-                  <a:srgbClr val="A7B097"/>
+                  <a:srgbClr val="B1BCB1"/>
                 </a:solidFill>
                 <a:latin typeface="Montserrat"/>
               </a:rPr>
@@ -4204,7 +4204,7 @@
             <a:avLst/>
           </a:prstGeom>
           <a:solidFill>
-            <a:srgbClr val="DBE6A7"/>
+            <a:srgbClr val="B1BCB1"/>
           </a:solidFill>
           <a:ln>
             <a:noFill/>
@@ -4511,7 +4511,7 @@
     <p:bg>
       <p:bgPr>
         <a:solidFill>
-          <a:srgbClr val="F4F1EA"/>
+          <a:srgbClr val="F3F1EA"/>
         </a:solidFill>
         <a:effectLst/>
       </p:bgPr>
@@ -4549,7 +4549,7 @@
             <a:r>
               <a:rPr sz="48000" b="1" i="0">
                 <a:solidFill>
-                  <a:srgbClr val="156826"/>
+                  <a:srgbClr val="31662F"/>
                 </a:solidFill>
                 <a:latin typeface="Montserrat"/>
               </a:rPr>
@@ -4588,7 +4588,7 @@
             <a:r>
               <a:rPr sz="5700" b="1" i="0">
                 <a:solidFill>
-                  <a:srgbClr val="22371F"/>
+                  <a:srgbClr val="1E3F1D"/>
                 </a:solidFill>
                 <a:latin typeface="Montserrat"/>
               </a:rPr>
@@ -4616,7 +4616,7 @@
           </a:solidFill>
           <a:ln w="28575">
             <a:solidFill>
-              <a:srgbClr val="156826"/>
+              <a:srgbClr val="31662F"/>
             </a:solidFill>
           </a:ln>
           <a:effectLst/>
@@ -4669,7 +4669,7 @@
             <a:r>
               <a:rPr sz="3000" b="1" i="0">
                 <a:solidFill>
-                  <a:srgbClr val="156826"/>
+                  <a:srgbClr val="31662F"/>
                 </a:solidFill>
                 <a:latin typeface="Montserrat"/>
               </a:rPr>
@@ -4704,7 +4704,7 @@
             <a:r>
               <a:rPr sz="3000" b="1" i="0">
                 <a:solidFill>
-                  <a:srgbClr val="156826"/>
+                  <a:srgbClr val="31662F"/>
                 </a:solidFill>
                 <a:latin typeface="Montserrat"/>
               </a:rPr>
@@ -4763,7 +4763,7 @@
             <a:avLst/>
           </a:prstGeom>
           <a:solidFill>
-            <a:srgbClr val="A7B097"/>
+            <a:srgbClr val="B1BCB1"/>
           </a:solidFill>
           <a:ln>
             <a:noFill/>
@@ -4807,7 +4807,7 @@
             <a:avLst/>
           </a:prstGeom>
           <a:solidFill>
-            <a:srgbClr val="156826"/>
+            <a:srgbClr val="31662F"/>
           </a:solidFill>
           <a:ln>
             <a:noFill/>
@@ -4851,7 +4851,7 @@
             <a:avLst/>
           </a:prstGeom>
           <a:solidFill>
-            <a:srgbClr val="A7B097"/>
+            <a:srgbClr val="B1BCB1"/>
           </a:solidFill>
           <a:ln>
             <a:noFill/>
@@ -4895,7 +4895,7 @@
             <a:avLst/>
           </a:prstGeom>
           <a:solidFill>
-            <a:srgbClr val="A7B097"/>
+            <a:srgbClr val="B1BCB1"/>
           </a:solidFill>
           <a:ln>
             <a:noFill/>
@@ -4939,7 +4939,7 @@
             <a:avLst/>
           </a:prstGeom>
           <a:solidFill>
-            <a:srgbClr val="A7B097"/>
+            <a:srgbClr val="B1BCB1"/>
           </a:solidFill>
           <a:ln>
             <a:noFill/>
@@ -4983,7 +4983,7 @@
             <a:avLst/>
           </a:prstGeom>
           <a:solidFill>
-            <a:srgbClr val="A7B097"/>
+            <a:srgbClr val="B1BCB1"/>
           </a:solidFill>
           <a:ln>
             <a:noFill/>
@@ -5027,7 +5027,7 @@
             <a:avLst/>
           </a:prstGeom>
           <a:solidFill>
-            <a:srgbClr val="A7B097"/>
+            <a:srgbClr val="B1BCB1"/>
           </a:solidFill>
           <a:ln>
             <a:noFill/>
@@ -5070,7 +5070,7 @@
     <p:bg>
       <p:bgPr>
         <a:solidFill>
-          <a:srgbClr val="F4F1EA"/>
+          <a:srgbClr val="F3F1EA"/>
         </a:solidFill>
         <a:effectLst/>
       </p:bgPr>
@@ -5108,7 +5108,7 @@
             <a:r>
               <a:rPr sz="48000" b="1" i="0">
                 <a:solidFill>
-                  <a:srgbClr val="156826"/>
+                  <a:srgbClr val="31662F"/>
                 </a:solidFill>
                 <a:latin typeface="Montserrat"/>
               </a:rPr>
@@ -5147,7 +5147,7 @@
             <a:r>
               <a:rPr sz="5700" b="1" i="0">
                 <a:solidFill>
-                  <a:srgbClr val="22371F"/>
+                  <a:srgbClr val="1E3F1D"/>
                 </a:solidFill>
                 <a:latin typeface="Montserrat"/>
               </a:rPr>
@@ -5175,7 +5175,7 @@
           </a:solidFill>
           <a:ln w="28575">
             <a:solidFill>
-              <a:srgbClr val="156826"/>
+              <a:srgbClr val="31662F"/>
             </a:solidFill>
           </a:ln>
           <a:effectLst/>
@@ -5228,7 +5228,7 @@
             <a:r>
               <a:rPr sz="3000" b="1" i="0">
                 <a:solidFill>
-                  <a:srgbClr val="156826"/>
+                  <a:srgbClr val="31662F"/>
                 </a:solidFill>
                 <a:latin typeface="Montserrat"/>
               </a:rPr>
@@ -5263,7 +5263,7 @@
             <a:r>
               <a:rPr sz="3000" b="1" i="0">
                 <a:solidFill>
-                  <a:srgbClr val="156826"/>
+                  <a:srgbClr val="31662F"/>
                 </a:solidFill>
                 <a:latin typeface="Montserrat"/>
               </a:rPr>
@@ -5322,7 +5322,7 @@
             <a:avLst/>
           </a:prstGeom>
           <a:solidFill>
-            <a:srgbClr val="A7B097"/>
+            <a:srgbClr val="B1BCB1"/>
           </a:solidFill>
           <a:ln>
             <a:noFill/>
@@ -5366,7 +5366,7 @@
             <a:avLst/>
           </a:prstGeom>
           <a:solidFill>
-            <a:srgbClr val="A7B097"/>
+            <a:srgbClr val="B1BCB1"/>
           </a:solidFill>
           <a:ln>
             <a:noFill/>
@@ -5410,7 +5410,7 @@
             <a:avLst/>
           </a:prstGeom>
           <a:solidFill>
-            <a:srgbClr val="156826"/>
+            <a:srgbClr val="31662F"/>
           </a:solidFill>
           <a:ln>
             <a:noFill/>
@@ -5454,7 +5454,7 @@
             <a:avLst/>
           </a:prstGeom>
           <a:solidFill>
-            <a:srgbClr val="A7B097"/>
+            <a:srgbClr val="B1BCB1"/>
           </a:solidFill>
           <a:ln>
             <a:noFill/>
@@ -5498,7 +5498,7 @@
             <a:avLst/>
           </a:prstGeom>
           <a:solidFill>
-            <a:srgbClr val="A7B097"/>
+            <a:srgbClr val="B1BCB1"/>
           </a:solidFill>
           <a:ln>
             <a:noFill/>
@@ -5542,7 +5542,7 @@
             <a:avLst/>
           </a:prstGeom>
           <a:solidFill>
-            <a:srgbClr val="A7B097"/>
+            <a:srgbClr val="B1BCB1"/>
           </a:solidFill>
           <a:ln>
             <a:noFill/>
@@ -5586,7 +5586,7 @@
             <a:avLst/>
           </a:prstGeom>
           <a:solidFill>
-            <a:srgbClr val="A7B097"/>
+            <a:srgbClr val="B1BCB1"/>
           </a:solidFill>
           <a:ln>
             <a:noFill/>
@@ -5629,7 +5629,7 @@
     <p:bg>
       <p:bgPr>
         <a:solidFill>
-          <a:srgbClr val="F4F1EA"/>
+          <a:srgbClr val="F3F1EA"/>
         </a:solidFill>
         <a:effectLst/>
       </p:bgPr>
@@ -5667,7 +5667,7 @@
             <a:r>
               <a:rPr sz="48000" b="1" i="0">
                 <a:solidFill>
-                  <a:srgbClr val="156826"/>
+                  <a:srgbClr val="31662F"/>
                 </a:solidFill>
                 <a:latin typeface="Montserrat"/>
               </a:rPr>
@@ -5706,7 +5706,7 @@
             <a:r>
               <a:rPr sz="5700" b="1" i="0">
                 <a:solidFill>
-                  <a:srgbClr val="22371F"/>
+                  <a:srgbClr val="1E3F1D"/>
                 </a:solidFill>
                 <a:latin typeface="Montserrat"/>
               </a:rPr>
@@ -5734,7 +5734,7 @@
           </a:solidFill>
           <a:ln w="28575">
             <a:solidFill>
-              <a:srgbClr val="156826"/>
+              <a:srgbClr val="31662F"/>
             </a:solidFill>
           </a:ln>
           <a:effectLst/>
@@ -5787,7 +5787,7 @@
             <a:r>
               <a:rPr sz="3000" b="1" i="0">
                 <a:solidFill>
-                  <a:srgbClr val="156826"/>
+                  <a:srgbClr val="31662F"/>
                 </a:solidFill>
                 <a:latin typeface="Montserrat"/>
               </a:rPr>
@@ -5822,7 +5822,7 @@
             <a:r>
               <a:rPr sz="3000" b="1" i="0">
                 <a:solidFill>
-                  <a:srgbClr val="156826"/>
+                  <a:srgbClr val="31662F"/>
                 </a:solidFill>
                 <a:latin typeface="Montserrat"/>
               </a:rPr>
@@ -5881,7 +5881,7 @@
             <a:avLst/>
           </a:prstGeom>
           <a:solidFill>
-            <a:srgbClr val="A7B097"/>
+            <a:srgbClr val="B1BCB1"/>
           </a:solidFill>
           <a:ln>
             <a:noFill/>
@@ -5925,7 +5925,7 @@
             <a:avLst/>
           </a:prstGeom>
           <a:solidFill>
-            <a:srgbClr val="A7B097"/>
+            <a:srgbClr val="B1BCB1"/>
           </a:solidFill>
           <a:ln>
             <a:noFill/>
@@ -5969,7 +5969,7 @@
             <a:avLst/>
           </a:prstGeom>
           <a:solidFill>
-            <a:srgbClr val="A7B097"/>
+            <a:srgbClr val="B1BCB1"/>
           </a:solidFill>
           <a:ln>
             <a:noFill/>
@@ -6013,7 +6013,7 @@
             <a:avLst/>
           </a:prstGeom>
           <a:solidFill>
-            <a:srgbClr val="156826"/>
+            <a:srgbClr val="31662F"/>
           </a:solidFill>
           <a:ln>
             <a:noFill/>
@@ -6057,7 +6057,7 @@
             <a:avLst/>
           </a:prstGeom>
           <a:solidFill>
-            <a:srgbClr val="A7B097"/>
+            <a:srgbClr val="B1BCB1"/>
           </a:solidFill>
           <a:ln>
             <a:noFill/>
@@ -6101,7 +6101,7 @@
             <a:avLst/>
           </a:prstGeom>
           <a:solidFill>
-            <a:srgbClr val="A7B097"/>
+            <a:srgbClr val="B1BCB1"/>
           </a:solidFill>
           <a:ln>
             <a:noFill/>
@@ -6145,7 +6145,7 @@
             <a:avLst/>
           </a:prstGeom>
           <a:solidFill>
-            <a:srgbClr val="A7B097"/>
+            <a:srgbClr val="B1BCB1"/>
           </a:solidFill>
           <a:ln>
             <a:noFill/>
@@ -6188,7 +6188,7 @@
     <p:bg>
       <p:bgPr>
         <a:solidFill>
-          <a:srgbClr val="F4F1EA"/>
+          <a:srgbClr val="F3F1EA"/>
         </a:solidFill>
         <a:effectLst/>
       </p:bgPr>
@@ -6226,7 +6226,7 @@
             <a:r>
               <a:rPr sz="48000" b="1" i="0">
                 <a:solidFill>
-                  <a:srgbClr val="156826"/>
+                  <a:srgbClr val="31662F"/>
                 </a:solidFill>
                 <a:latin typeface="Montserrat"/>
               </a:rPr>
@@ -6265,7 +6265,7 @@
             <a:r>
               <a:rPr sz="5700" b="1" i="0">
                 <a:solidFill>
-                  <a:srgbClr val="22371F"/>
+                  <a:srgbClr val="1E3F1D"/>
                 </a:solidFill>
                 <a:latin typeface="Montserrat"/>
               </a:rPr>
@@ -6293,7 +6293,7 @@
           </a:solidFill>
           <a:ln w="28575">
             <a:solidFill>
-              <a:srgbClr val="156826"/>
+              <a:srgbClr val="31662F"/>
             </a:solidFill>
           </a:ln>
           <a:effectLst/>
@@ -6346,7 +6346,7 @@
             <a:r>
               <a:rPr sz="3000" b="1" i="0">
                 <a:solidFill>
-                  <a:srgbClr val="156826"/>
+                  <a:srgbClr val="31662F"/>
                 </a:solidFill>
                 <a:latin typeface="Montserrat"/>
               </a:rPr>
@@ -6381,7 +6381,7 @@
             <a:r>
               <a:rPr sz="3000" b="1" i="0">
                 <a:solidFill>
-                  <a:srgbClr val="156826"/>
+                  <a:srgbClr val="31662F"/>
                 </a:solidFill>
                 <a:latin typeface="Montserrat"/>
               </a:rPr>
@@ -6440,7 +6440,7 @@
             <a:avLst/>
           </a:prstGeom>
           <a:solidFill>
-            <a:srgbClr val="A7B097"/>
+            <a:srgbClr val="B1BCB1"/>
           </a:solidFill>
           <a:ln>
             <a:noFill/>
@@ -6484,7 +6484,7 @@
             <a:avLst/>
           </a:prstGeom>
           <a:solidFill>
-            <a:srgbClr val="A7B097"/>
+            <a:srgbClr val="B1BCB1"/>
           </a:solidFill>
           <a:ln>
             <a:noFill/>
@@ -6528,7 +6528,7 @@
             <a:avLst/>
           </a:prstGeom>
           <a:solidFill>
-            <a:srgbClr val="A7B097"/>
+            <a:srgbClr val="B1BCB1"/>
           </a:solidFill>
           <a:ln>
             <a:noFill/>
@@ -6572,7 +6572,7 @@
             <a:avLst/>
           </a:prstGeom>
           <a:solidFill>
-            <a:srgbClr val="A7B097"/>
+            <a:srgbClr val="B1BCB1"/>
           </a:solidFill>
           <a:ln>
             <a:noFill/>
@@ -6616,7 +6616,7 @@
             <a:avLst/>
           </a:prstGeom>
           <a:solidFill>
-            <a:srgbClr val="156826"/>
+            <a:srgbClr val="31662F"/>
           </a:solidFill>
           <a:ln>
             <a:noFill/>
@@ -6660,7 +6660,7 @@
             <a:avLst/>
           </a:prstGeom>
           <a:solidFill>
-            <a:srgbClr val="A7B097"/>
+            <a:srgbClr val="B1BCB1"/>
           </a:solidFill>
           <a:ln>
             <a:noFill/>
@@ -6704,7 +6704,7 @@
             <a:avLst/>
           </a:prstGeom>
           <a:solidFill>
-            <a:srgbClr val="A7B097"/>
+            <a:srgbClr val="B1BCB1"/>
           </a:solidFill>
           <a:ln>
             <a:noFill/>
@@ -6747,7 +6747,7 @@
     <p:bg>
       <p:bgPr>
         <a:solidFill>
-          <a:srgbClr val="F4F1EA"/>
+          <a:srgbClr val="F3F1EA"/>
         </a:solidFill>
         <a:effectLst/>
       </p:bgPr>
@@ -6785,7 +6785,7 @@
             <a:r>
               <a:rPr sz="48000" b="1" i="0">
                 <a:solidFill>
-                  <a:srgbClr val="156826"/>
+                  <a:srgbClr val="31662F"/>
                 </a:solidFill>
                 <a:latin typeface="Montserrat"/>
               </a:rPr>
@@ -6824,7 +6824,7 @@
             <a:r>
               <a:rPr sz="5700" b="1" i="0">
                 <a:solidFill>
-                  <a:srgbClr val="22371F"/>
+                  <a:srgbClr val="1E3F1D"/>
                 </a:solidFill>
                 <a:latin typeface="Montserrat"/>
               </a:rPr>
@@ -6852,7 +6852,7 @@
           </a:solidFill>
           <a:ln w="28575">
             <a:solidFill>
-              <a:srgbClr val="156826"/>
+              <a:srgbClr val="31662F"/>
             </a:solidFill>
           </a:ln>
           <a:effectLst/>
@@ -6905,7 +6905,7 @@
             <a:r>
               <a:rPr sz="3000" b="1" i="0">
                 <a:solidFill>
-                  <a:srgbClr val="156826"/>
+                  <a:srgbClr val="31662F"/>
                 </a:solidFill>
                 <a:latin typeface="Montserrat"/>
               </a:rPr>
@@ -6940,7 +6940,7 @@
             <a:r>
               <a:rPr sz="3000" b="1" i="0">
                 <a:solidFill>
-                  <a:srgbClr val="156826"/>
+                  <a:srgbClr val="31662F"/>
                 </a:solidFill>
                 <a:latin typeface="Montserrat"/>
               </a:rPr>
@@ -6999,7 +6999,7 @@
             <a:avLst/>
           </a:prstGeom>
           <a:solidFill>
-            <a:srgbClr val="A7B097"/>
+            <a:srgbClr val="B1BCB1"/>
           </a:solidFill>
           <a:ln>
             <a:noFill/>
@@ -7043,7 +7043,7 @@
             <a:avLst/>
           </a:prstGeom>
           <a:solidFill>
-            <a:srgbClr val="A7B097"/>
+            <a:srgbClr val="B1BCB1"/>
           </a:solidFill>
           <a:ln>
             <a:noFill/>
@@ -7087,7 +7087,7 @@
             <a:avLst/>
           </a:prstGeom>
           <a:solidFill>
-            <a:srgbClr val="A7B097"/>
+            <a:srgbClr val="B1BCB1"/>
           </a:solidFill>
           <a:ln>
             <a:noFill/>
@@ -7131,7 +7131,7 @@
             <a:avLst/>
           </a:prstGeom>
           <a:solidFill>
-            <a:srgbClr val="A7B097"/>
+            <a:srgbClr val="B1BCB1"/>
           </a:solidFill>
           <a:ln>
             <a:noFill/>
@@ -7175,7 +7175,7 @@
             <a:avLst/>
           </a:prstGeom>
           <a:solidFill>
-            <a:srgbClr val="A7B097"/>
+            <a:srgbClr val="B1BCB1"/>
           </a:solidFill>
           <a:ln>
             <a:noFill/>
@@ -7219,7 +7219,7 @@
             <a:avLst/>
           </a:prstGeom>
           <a:solidFill>
-            <a:srgbClr val="156826"/>
+            <a:srgbClr val="31662F"/>
           </a:solidFill>
           <a:ln>
             <a:noFill/>
@@ -7263,7 +7263,7 @@
             <a:avLst/>
           </a:prstGeom>
           <a:solidFill>
-            <a:srgbClr val="A7B097"/>
+            <a:srgbClr val="B1BCB1"/>
           </a:solidFill>
           <a:ln>
             <a:noFill/>
@@ -7344,7 +7344,7 @@
             <a:r>
               <a:rPr sz="3000" b="1" i="0">
                 <a:solidFill>
-                  <a:srgbClr val="156826"/>
+                  <a:srgbClr val="31662F"/>
                 </a:solidFill>
                 <a:latin typeface="Montserrat"/>
               </a:rPr>
@@ -7383,7 +7383,7 @@
             <a:r>
               <a:rPr sz="3600" b="1" i="0">
                 <a:solidFill>
-                  <a:srgbClr val="22371F"/>
+                  <a:srgbClr val="1E3F1D"/>
                 </a:solidFill>
                 <a:latin typeface="Montserrat"/>
               </a:rPr>
@@ -7451,7 +7451,7 @@
             <a:avLst/>
           </a:prstGeom>
           <a:solidFill>
-            <a:srgbClr val="156826"/>
+            <a:srgbClr val="31662F"/>
           </a:solidFill>
           <a:ln>
             <a:noFill/>
@@ -7506,7 +7506,7 @@
             <a:r>
               <a:rPr sz="3000" b="1" i="0">
                 <a:solidFill>
-                  <a:srgbClr val="DBE6A7"/>
+                  <a:srgbClr val="B1BCB1"/>
                 </a:solidFill>
                 <a:latin typeface="Montserrat"/>
               </a:rPr>
@@ -7541,7 +7541,7 @@
             <a:r>
               <a:rPr sz="3300" b="1" i="0">
                 <a:solidFill>
-                  <a:srgbClr val="22371F"/>
+                  <a:srgbClr val="1E3F1D"/>
                 </a:solidFill>
                 <a:latin typeface="Montserrat"/>
               </a:rPr>
@@ -7609,7 +7609,7 @@
             <a:avLst/>
           </a:prstGeom>
           <a:solidFill>
-            <a:srgbClr val="156826"/>
+            <a:srgbClr val="31662F"/>
           </a:solidFill>
           <a:ln>
             <a:noFill/>
@@ -7664,7 +7664,7 @@
             <a:r>
               <a:rPr sz="3000" b="1" i="0">
                 <a:solidFill>
-                  <a:srgbClr val="DBE6A7"/>
+                  <a:srgbClr val="B1BCB1"/>
                 </a:solidFill>
                 <a:latin typeface="Montserrat"/>
               </a:rPr>
@@ -7699,7 +7699,7 @@
             <a:r>
               <a:rPr sz="3300" b="1" i="0">
                 <a:solidFill>
-                  <a:srgbClr val="22371F"/>
+                  <a:srgbClr val="1E3F1D"/>
                 </a:solidFill>
                 <a:latin typeface="Montserrat"/>
               </a:rPr>
@@ -7767,7 +7767,7 @@
             <a:avLst/>
           </a:prstGeom>
           <a:solidFill>
-            <a:srgbClr val="156826"/>
+            <a:srgbClr val="31662F"/>
           </a:solidFill>
           <a:ln>
             <a:noFill/>
@@ -7822,7 +7822,7 @@
             <a:r>
               <a:rPr sz="3000" b="1" i="0">
                 <a:solidFill>
-                  <a:srgbClr val="DBE6A7"/>
+                  <a:srgbClr val="B1BCB1"/>
                 </a:solidFill>
                 <a:latin typeface="Montserrat"/>
               </a:rPr>
@@ -7857,7 +7857,7 @@
             <a:r>
               <a:rPr sz="3300" b="1" i="0">
                 <a:solidFill>
-                  <a:srgbClr val="22371F"/>
+                  <a:srgbClr val="1E3F1D"/>
                 </a:solidFill>
                 <a:latin typeface="Montserrat"/>
               </a:rPr>
@@ -7925,7 +7925,7 @@
             <a:avLst/>
           </a:prstGeom>
           <a:solidFill>
-            <a:srgbClr val="156826"/>
+            <a:srgbClr val="31662F"/>
           </a:solidFill>
           <a:ln>
             <a:noFill/>
@@ -7980,7 +7980,7 @@
             <a:r>
               <a:rPr sz="3000" b="1" i="0">
                 <a:solidFill>
-                  <a:srgbClr val="DBE6A7"/>
+                  <a:srgbClr val="B1BCB1"/>
                 </a:solidFill>
                 <a:latin typeface="Montserrat"/>
               </a:rPr>
@@ -8015,7 +8015,7 @@
             <a:r>
               <a:rPr sz="3300" b="1" i="0">
                 <a:solidFill>
-                  <a:srgbClr val="22371F"/>
+                  <a:srgbClr val="1E3F1D"/>
                 </a:solidFill>
                 <a:latin typeface="Montserrat"/>
               </a:rPr>
@@ -8083,7 +8083,7 @@
             <a:avLst/>
           </a:prstGeom>
           <a:solidFill>
-            <a:srgbClr val="156826"/>
+            <a:srgbClr val="31662F"/>
           </a:solidFill>
           <a:ln>
             <a:noFill/>
@@ -8138,7 +8138,7 @@
             <a:r>
               <a:rPr sz="3000" b="1" i="0">
                 <a:solidFill>
-                  <a:srgbClr val="DBE6A7"/>
+                  <a:srgbClr val="B1BCB1"/>
                 </a:solidFill>
                 <a:latin typeface="Montserrat"/>
               </a:rPr>
@@ -8173,7 +8173,7 @@
             <a:r>
               <a:rPr sz="3300" b="1" i="0">
                 <a:solidFill>
-                  <a:srgbClr val="22371F"/>
+                  <a:srgbClr val="1E3F1D"/>
                 </a:solidFill>
                 <a:latin typeface="Montserrat"/>
               </a:rPr>
@@ -8232,7 +8232,7 @@
             <a:avLst/>
           </a:prstGeom>
           <a:solidFill>
-            <a:srgbClr val="A7B097"/>
+            <a:srgbClr val="B1BCB1"/>
           </a:solidFill>
           <a:ln>
             <a:noFill/>
@@ -8276,7 +8276,7 @@
             <a:avLst/>
           </a:prstGeom>
           <a:solidFill>
-            <a:srgbClr val="A7B097"/>
+            <a:srgbClr val="B1BCB1"/>
           </a:solidFill>
           <a:ln>
             <a:noFill/>
@@ -8320,7 +8320,7 @@
             <a:avLst/>
           </a:prstGeom>
           <a:solidFill>
-            <a:srgbClr val="A7B097"/>
+            <a:srgbClr val="B1BCB1"/>
           </a:solidFill>
           <a:ln>
             <a:noFill/>
@@ -8364,7 +8364,7 @@
             <a:avLst/>
           </a:prstGeom>
           <a:solidFill>
-            <a:srgbClr val="A7B097"/>
+            <a:srgbClr val="B1BCB1"/>
           </a:solidFill>
           <a:ln>
             <a:noFill/>
@@ -8408,7 +8408,7 @@
             <a:avLst/>
           </a:prstGeom>
           <a:solidFill>
-            <a:srgbClr val="A7B097"/>
+            <a:srgbClr val="B1BCB1"/>
           </a:solidFill>
           <a:ln>
             <a:noFill/>
@@ -8452,7 +8452,7 @@
             <a:avLst/>
           </a:prstGeom>
           <a:solidFill>
-            <a:srgbClr val="A7B097"/>
+            <a:srgbClr val="B1BCB1"/>
           </a:solidFill>
           <a:ln>
             <a:noFill/>
@@ -8496,7 +8496,7 @@
             <a:avLst/>
           </a:prstGeom>
           <a:solidFill>
-            <a:srgbClr val="156826"/>
+            <a:srgbClr val="31662F"/>
           </a:solidFill>
           <a:ln>
             <a:noFill/>
